--- a/docs/Present.pptx
+++ b/docs/Present.pptx
@@ -5,10 +5,11 @@
     <p:sldMasterId id="2147483648" r:id="rId1"/>
   </p:sldMasterIdLst>
   <p:notesMasterIdLst>
-    <p:notesMasterId r:id="rId3"/>
+    <p:notesMasterId r:id="rId4"/>
   </p:notesMasterIdLst>
   <p:sldIdLst>
     <p:sldId id="327" r:id="rId2"/>
+    <p:sldId id="328" r:id="rId3"/>
   </p:sldIdLst>
   <p:sldSz cx="12192000" cy="6858000"/>
   <p:notesSz cx="6858000" cy="9144000"/>
@@ -197,7 +198,7 @@
           <a:p>
             <a:fld id="{242390B3-2094-445A-AD94-A98460EB0B1D}" type="datetimeFigureOut">
               <a:rPr lang="en-US" smtClean="0"/>
-              <a:t>10/11/2026</a:t>
+              <a:t>10/12/2026</a:t>
             </a:fld>
             <a:endParaRPr lang="en-US"/>
           </a:p>
@@ -548,6 +549,90 @@
 </p:notes>
 </file>
 
+<file path=ppt/notesSlides/notesSlide2.xml><?xml version="1.0" encoding="utf-8"?>
+<p:notes xmlns:a="http://schemas.openxmlformats.org/drawingml/2006/main" xmlns:r="http://schemas.openxmlformats.org/officeDocument/2006/relationships" xmlns:p="http://schemas.openxmlformats.org/presentationml/2006/main">
+  <p:cSld>
+    <p:spTree>
+      <p:nvGrpSpPr>
+        <p:cNvPr id="1" name=""/>
+        <p:cNvGrpSpPr/>
+        <p:nvPr/>
+      </p:nvGrpSpPr>
+      <p:grpSpPr>
+        <a:xfrm>
+          <a:off x="0" y="0"/>
+          <a:ext cx="0" cy="0"/>
+          <a:chOff x="0" y="0"/>
+          <a:chExt cx="0" cy="0"/>
+        </a:xfrm>
+      </p:grpSpPr>
+      <p:sp>
+        <p:nvSpPr>
+          <p:cNvPr id="2" name="Slide Image Placeholder 1"/>
+          <p:cNvSpPr>
+            <a:spLocks noGrp="1" noRot="1" noChangeAspect="1"/>
+          </p:cNvSpPr>
+          <p:nvPr>
+            <p:ph type="sldImg"/>
+          </p:nvPr>
+        </p:nvSpPr>
+        <p:spPr/>
+      </p:sp>
+      <p:sp>
+        <p:nvSpPr>
+          <p:cNvPr id="3" name="Notes Placeholder 2"/>
+          <p:cNvSpPr>
+            <a:spLocks noGrp="1"/>
+          </p:cNvSpPr>
+          <p:nvPr>
+            <p:ph type="body" idx="1"/>
+          </p:nvPr>
+        </p:nvSpPr>
+        <p:spPr/>
+        <p:txBody>
+          <a:bodyPr/>
+          <a:lstStyle/>
+          <a:p>
+            <a:endParaRPr lang="en-US" dirty="0"/>
+          </a:p>
+        </p:txBody>
+      </p:sp>
+      <p:sp>
+        <p:nvSpPr>
+          <p:cNvPr id="4" name="Slide Number Placeholder 3"/>
+          <p:cNvSpPr>
+            <a:spLocks noGrp="1"/>
+          </p:cNvSpPr>
+          <p:nvPr>
+            <p:ph type="sldNum" sz="quarter" idx="10"/>
+          </p:nvPr>
+        </p:nvSpPr>
+        <p:spPr/>
+        <p:txBody>
+          <a:bodyPr/>
+          <a:lstStyle/>
+          <a:p>
+            <a:fld id="{17A7E97F-9E42-4B6C-B0EB-314CE5850F2E}" type="slidenum">
+              <a:rPr lang="en-US" smtClean="0"/>
+              <a:t>2</a:t>
+            </a:fld>
+            <a:endParaRPr lang="en-US"/>
+          </a:p>
+        </p:txBody>
+      </p:sp>
+    </p:spTree>
+    <p:extLst>
+      <p:ext uri="{BB962C8B-B14F-4D97-AF65-F5344CB8AC3E}">
+        <p14:creationId xmlns:p14="http://schemas.microsoft.com/office/powerpoint/2010/main" val="3317574676"/>
+      </p:ext>
+    </p:extLst>
+  </p:cSld>
+  <p:clrMapOvr>
+    <a:masterClrMapping/>
+  </p:clrMapOvr>
+</p:notes>
+</file>
+
 <file path=ppt/slideLayouts/slideLayout1.xml><?xml version="1.0" encoding="utf-8"?>
 <p:sldLayout xmlns:a="http://schemas.openxmlformats.org/drawingml/2006/main" xmlns:r="http://schemas.openxmlformats.org/officeDocument/2006/relationships" xmlns:p="http://schemas.openxmlformats.org/presentationml/2006/main" type="title" preserve="1">
   <p:cSld name="Title Slide">
@@ -677,7 +762,7 @@
           <a:p>
             <a:fld id="{AF3E8E8A-1D80-4C20-AA27-646765A8CA42}" type="datetimeFigureOut">
               <a:rPr lang="en-US" smtClean="0"/>
-              <a:t>10/11/2026</a:t>
+              <a:t>10/12/2026</a:t>
             </a:fld>
             <a:endParaRPr lang="en-US"/>
           </a:p>
@@ -845,7 +930,7 @@
           <a:p>
             <a:fld id="{AF3E8E8A-1D80-4C20-AA27-646765A8CA42}" type="datetimeFigureOut">
               <a:rPr lang="en-US" smtClean="0"/>
-              <a:t>10/11/2026</a:t>
+              <a:t>10/12/2026</a:t>
             </a:fld>
             <a:endParaRPr lang="en-US"/>
           </a:p>
@@ -1023,7 +1108,7 @@
           <a:p>
             <a:fld id="{AF3E8E8A-1D80-4C20-AA27-646765A8CA42}" type="datetimeFigureOut">
               <a:rPr lang="en-US" smtClean="0"/>
-              <a:t>10/11/2026</a:t>
+              <a:t>10/12/2026</a:t>
             </a:fld>
             <a:endParaRPr lang="en-US"/>
           </a:p>
@@ -1191,7 +1276,7 @@
           <a:p>
             <a:fld id="{AF3E8E8A-1D80-4C20-AA27-646765A8CA42}" type="datetimeFigureOut">
               <a:rPr lang="en-US" smtClean="0"/>
-              <a:t>10/11/2026</a:t>
+              <a:t>10/12/2026</a:t>
             </a:fld>
             <a:endParaRPr lang="en-US"/>
           </a:p>
@@ -1436,7 +1521,7 @@
           <a:p>
             <a:fld id="{AF3E8E8A-1D80-4C20-AA27-646765A8CA42}" type="datetimeFigureOut">
               <a:rPr lang="en-US" smtClean="0"/>
-              <a:t>10/11/2026</a:t>
+              <a:t>10/12/2026</a:t>
             </a:fld>
             <a:endParaRPr lang="en-US"/>
           </a:p>
@@ -1665,7 +1750,7 @@
           <a:p>
             <a:fld id="{AF3E8E8A-1D80-4C20-AA27-646765A8CA42}" type="datetimeFigureOut">
               <a:rPr lang="en-US" smtClean="0"/>
-              <a:t>10/11/2026</a:t>
+              <a:t>10/12/2026</a:t>
             </a:fld>
             <a:endParaRPr lang="en-US"/>
           </a:p>
@@ -2029,7 +2114,7 @@
           <a:p>
             <a:fld id="{AF3E8E8A-1D80-4C20-AA27-646765A8CA42}" type="datetimeFigureOut">
               <a:rPr lang="en-US" smtClean="0"/>
-              <a:t>10/11/2026</a:t>
+              <a:t>10/12/2026</a:t>
             </a:fld>
             <a:endParaRPr lang="en-US"/>
           </a:p>
@@ -2146,7 +2231,7 @@
           <a:p>
             <a:fld id="{AF3E8E8A-1D80-4C20-AA27-646765A8CA42}" type="datetimeFigureOut">
               <a:rPr lang="en-US" smtClean="0"/>
-              <a:t>10/11/2026</a:t>
+              <a:t>10/12/2026</a:t>
             </a:fld>
             <a:endParaRPr lang="en-US"/>
           </a:p>
@@ -2241,7 +2326,7 @@
           <a:p>
             <a:fld id="{AF3E8E8A-1D80-4C20-AA27-646765A8CA42}" type="datetimeFigureOut">
               <a:rPr lang="en-US" smtClean="0"/>
-              <a:t>10/11/2026</a:t>
+              <a:t>10/12/2026</a:t>
             </a:fld>
             <a:endParaRPr lang="en-US"/>
           </a:p>
@@ -2516,7 +2601,7 @@
           <a:p>
             <a:fld id="{AF3E8E8A-1D80-4C20-AA27-646765A8CA42}" type="datetimeFigureOut">
               <a:rPr lang="en-US" smtClean="0"/>
-              <a:t>10/11/2026</a:t>
+              <a:t>10/12/2026</a:t>
             </a:fld>
             <a:endParaRPr lang="en-US"/>
           </a:p>
@@ -2768,7 +2853,7 @@
           <a:p>
             <a:fld id="{AF3E8E8A-1D80-4C20-AA27-646765A8CA42}" type="datetimeFigureOut">
               <a:rPr lang="en-US" smtClean="0"/>
-              <a:t>10/11/2026</a:t>
+              <a:t>10/12/2026</a:t>
             </a:fld>
             <a:endParaRPr lang="en-US"/>
           </a:p>
@@ -2979,7 +3064,7 @@
           <a:p>
             <a:fld id="{AF3E8E8A-1D80-4C20-AA27-646765A8CA42}" type="datetimeFigureOut">
               <a:rPr lang="en-US" smtClean="0"/>
-              <a:t>10/11/2026</a:t>
+              <a:t>10/12/2026</a:t>
             </a:fld>
             <a:endParaRPr lang="en-US"/>
           </a:p>
@@ -4248,6 +4333,950 @@
 </p:sld>
 </file>
 
+<file path=ppt/slides/slide2.xml><?xml version="1.0" encoding="utf-8"?>
+<p:sld xmlns:a="http://schemas.openxmlformats.org/drawingml/2006/main" xmlns:r="http://schemas.openxmlformats.org/officeDocument/2006/relationships" xmlns:p="http://schemas.openxmlformats.org/presentationml/2006/main">
+  <p:cSld>
+    <p:spTree>
+      <p:nvGrpSpPr>
+        <p:cNvPr id="1" name=""/>
+        <p:cNvGrpSpPr/>
+        <p:nvPr/>
+      </p:nvGrpSpPr>
+      <p:grpSpPr>
+        <a:xfrm>
+          <a:off x="0" y="0"/>
+          <a:ext cx="0" cy="0"/>
+          <a:chOff x="0" y="0"/>
+          <a:chExt cx="0" cy="0"/>
+        </a:xfrm>
+      </p:grpSpPr>
+      <p:pic>
+        <p:nvPicPr>
+          <p:cNvPr id="6" name="Picture 5"/>
+          <p:cNvPicPr>
+            <a:picLocks noChangeAspect="1"/>
+          </p:cNvPicPr>
+          <p:nvPr/>
+        </p:nvPicPr>
+        <p:blipFill>
+          <a:blip r:embed="rId3" cstate="print">
+            <a:extLst>
+              <a:ext uri="{28A0092B-C50C-407E-A947-70E740481C1C}">
+                <a14:useLocalDpi xmlns:a14="http://schemas.microsoft.com/office/drawing/2010/main" val="0"/>
+              </a:ext>
+            </a:extLst>
+          </a:blip>
+          <a:stretch>
+            <a:fillRect/>
+          </a:stretch>
+        </p:blipFill>
+        <p:spPr>
+          <a:xfrm>
+            <a:off x="189352" y="19345"/>
+            <a:ext cx="1918847" cy="2138143"/>
+          </a:xfrm>
+          <a:prstGeom prst="rect">
+            <a:avLst/>
+          </a:prstGeom>
+        </p:spPr>
+      </p:pic>
+      <p:pic>
+        <p:nvPicPr>
+          <p:cNvPr id="11" name="Picture 10"/>
+          <p:cNvPicPr>
+            <a:picLocks noChangeAspect="1"/>
+          </p:cNvPicPr>
+          <p:nvPr/>
+        </p:nvPicPr>
+        <p:blipFill>
+          <a:blip r:embed="rId4"/>
+          <a:stretch>
+            <a:fillRect/>
+          </a:stretch>
+        </p:blipFill>
+        <p:spPr>
+          <a:xfrm>
+            <a:off x="9935079" y="132789"/>
+            <a:ext cx="2067568" cy="1983176"/>
+          </a:xfrm>
+          <a:prstGeom prst="rect">
+            <a:avLst/>
+          </a:prstGeom>
+        </p:spPr>
+      </p:pic>
+      <p:sp>
+        <p:nvSpPr>
+          <p:cNvPr id="3" name="Овал 2">
+            <a:extLst>
+              <a:ext uri="{FF2B5EF4-FFF2-40B4-BE49-F238E27FC236}">
+                <a16:creationId xmlns:a16="http://schemas.microsoft.com/office/drawing/2014/main" id="{31DB543E-42E8-4366-B141-F0380843F4CA}"/>
+              </a:ext>
+            </a:extLst>
+          </p:cNvPr>
+          <p:cNvSpPr/>
+          <p:nvPr/>
+        </p:nvSpPr>
+        <p:spPr>
+          <a:xfrm>
+            <a:off x="3327400" y="131161"/>
+            <a:ext cx="5194299" cy="2307239"/>
+          </a:xfrm>
+          <a:prstGeom prst="ellipse">
+            <a:avLst/>
+          </a:prstGeom>
+          <a:solidFill>
+            <a:schemeClr val="accent5">
+              <a:lumMod val="20000"/>
+              <a:lumOff val="80000"/>
+            </a:schemeClr>
+          </a:solidFill>
+          <a:ln w="25400">
+            <a:solidFill>
+              <a:schemeClr val="accent5">
+                <a:lumMod val="50000"/>
+              </a:schemeClr>
+            </a:solidFill>
+          </a:ln>
+        </p:spPr>
+        <p:style>
+          <a:lnRef idx="2">
+            <a:schemeClr val="accent1">
+              <a:shade val="50000"/>
+            </a:schemeClr>
+          </a:lnRef>
+          <a:fillRef idx="1">
+            <a:schemeClr val="accent1"/>
+          </a:fillRef>
+          <a:effectRef idx="0">
+            <a:schemeClr val="accent1"/>
+          </a:effectRef>
+          <a:fontRef idx="minor">
+            <a:schemeClr val="lt1"/>
+          </a:fontRef>
+        </p:style>
+        <p:txBody>
+          <a:bodyPr rtlCol="0" anchor="ctr"/>
+          <a:lstStyle/>
+          <a:p>
+            <a:pPr algn="ctr"/>
+            <a:endParaRPr lang="uk-UA" dirty="0"/>
+          </a:p>
+        </p:txBody>
+      </p:sp>
+      <p:sp>
+        <p:nvSpPr>
+          <p:cNvPr id="9" name="TextBox 8">
+            <a:extLst>
+              <a:ext uri="{FF2B5EF4-FFF2-40B4-BE49-F238E27FC236}">
+                <a16:creationId xmlns:a16="http://schemas.microsoft.com/office/drawing/2014/main" id="{F2661E47-7388-437F-B76E-37466D721247}"/>
+              </a:ext>
+            </a:extLst>
+          </p:cNvPr>
+          <p:cNvSpPr txBox="1"/>
+          <p:nvPr/>
+        </p:nvSpPr>
+        <p:spPr>
+          <a:xfrm>
+            <a:off x="3719793" y="557634"/>
+            <a:ext cx="4534815" cy="1338828"/>
+          </a:xfrm>
+          <a:prstGeom prst="rect">
+            <a:avLst/>
+          </a:prstGeom>
+          <a:noFill/>
+        </p:spPr>
+        <p:txBody>
+          <a:bodyPr wrap="square">
+            <a:spAutoFit/>
+          </a:bodyPr>
+          <a:lstStyle>
+            <a:defPPr>
+              <a:defRPr lang="en-US"/>
+            </a:defPPr>
+            <a:lvl1pPr algn="ctr">
+              <a:lnSpc>
+                <a:spcPct val="90000"/>
+              </a:lnSpc>
+              <a:defRPr sz="4500"/>
+            </a:lvl1pPr>
+          </a:lstStyle>
+          <a:p>
+            <a:r>
+              <a:rPr lang="uk-UA" altLang="ja-JP" dirty="0"/>
+              <a:t>Кафедра лінгводидактики</a:t>
+            </a:r>
+            <a:endParaRPr lang="uk-UA" dirty="0"/>
+          </a:p>
+        </p:txBody>
+      </p:sp>
+      <p:sp>
+        <p:nvSpPr>
+          <p:cNvPr id="10" name="Овал 9">
+            <a:extLst>
+              <a:ext uri="{FF2B5EF4-FFF2-40B4-BE49-F238E27FC236}">
+                <a16:creationId xmlns:a16="http://schemas.microsoft.com/office/drawing/2014/main" id="{540F6BDB-5947-41B4-8267-C32EDC2CBAF8}"/>
+              </a:ext>
+            </a:extLst>
+          </p:cNvPr>
+          <p:cNvSpPr/>
+          <p:nvPr/>
+        </p:nvSpPr>
+        <p:spPr>
+          <a:xfrm>
+            <a:off x="7277100" y="3966253"/>
+            <a:ext cx="4705820" cy="2722293"/>
+          </a:xfrm>
+          <a:prstGeom prst="ellipse">
+            <a:avLst/>
+          </a:prstGeom>
+          <a:solidFill>
+            <a:schemeClr val="accent5">
+              <a:lumMod val="20000"/>
+              <a:lumOff val="80000"/>
+            </a:schemeClr>
+          </a:solidFill>
+          <a:ln w="25400">
+            <a:solidFill>
+              <a:schemeClr val="accent5">
+                <a:lumMod val="50000"/>
+              </a:schemeClr>
+            </a:solidFill>
+          </a:ln>
+        </p:spPr>
+        <p:style>
+          <a:lnRef idx="2">
+            <a:schemeClr val="accent1">
+              <a:shade val="50000"/>
+            </a:schemeClr>
+          </a:lnRef>
+          <a:fillRef idx="1">
+            <a:schemeClr val="accent1"/>
+          </a:fillRef>
+          <a:effectRef idx="0">
+            <a:schemeClr val="accent1"/>
+          </a:effectRef>
+          <a:fontRef idx="minor">
+            <a:schemeClr val="lt1"/>
+          </a:fontRef>
+        </p:style>
+        <p:txBody>
+          <a:bodyPr rtlCol="0" anchor="ctr"/>
+          <a:lstStyle/>
+          <a:p>
+            <a:pPr algn="ctr"/>
+            <a:endParaRPr lang="uk-UA" dirty="0"/>
+          </a:p>
+        </p:txBody>
+      </p:sp>
+      <p:sp>
+        <p:nvSpPr>
+          <p:cNvPr id="12" name="TextBox 11">
+            <a:extLst>
+              <a:ext uri="{FF2B5EF4-FFF2-40B4-BE49-F238E27FC236}">
+                <a16:creationId xmlns:a16="http://schemas.microsoft.com/office/drawing/2014/main" id="{26399A4D-776A-4A3A-9392-F9DE3BCA8D07}"/>
+              </a:ext>
+            </a:extLst>
+          </p:cNvPr>
+          <p:cNvSpPr txBox="1"/>
+          <p:nvPr/>
+        </p:nvSpPr>
+        <p:spPr>
+          <a:xfrm>
+            <a:off x="7670801" y="4034737"/>
+            <a:ext cx="4196834" cy="2585323"/>
+          </a:xfrm>
+          <a:prstGeom prst="rect">
+            <a:avLst/>
+          </a:prstGeom>
+          <a:noFill/>
+        </p:spPr>
+        <p:txBody>
+          <a:bodyPr wrap="square">
+            <a:spAutoFit/>
+          </a:bodyPr>
+          <a:lstStyle/>
+          <a:p>
+            <a:pPr algn="ctr">
+              <a:lnSpc>
+                <a:spcPct val="90000"/>
+              </a:lnSpc>
+            </a:pPr>
+            <a:r>
+              <a:rPr lang="uk-UA" sz="4500" dirty="0"/>
+              <a:t>Кафедра психології </a:t>
+            </a:r>
+          </a:p>
+          <a:p>
+            <a:pPr algn="ctr">
+              <a:lnSpc>
+                <a:spcPct val="90000"/>
+              </a:lnSpc>
+            </a:pPr>
+            <a:r>
+              <a:rPr lang="uk-UA" sz="4500" dirty="0"/>
+              <a:t>та соціальної </a:t>
+            </a:r>
+          </a:p>
+          <a:p>
+            <a:pPr algn="ctr">
+              <a:lnSpc>
+                <a:spcPct val="90000"/>
+              </a:lnSpc>
+            </a:pPr>
+            <a:r>
+              <a:rPr lang="uk-UA" sz="4500" dirty="0"/>
+              <a:t>роботи</a:t>
+            </a:r>
+          </a:p>
+        </p:txBody>
+      </p:sp>
+      <p:sp>
+        <p:nvSpPr>
+          <p:cNvPr id="13" name="Овал 12">
+            <a:extLst>
+              <a:ext uri="{FF2B5EF4-FFF2-40B4-BE49-F238E27FC236}">
+                <a16:creationId xmlns:a16="http://schemas.microsoft.com/office/drawing/2014/main" id="{E846E8DE-C6A5-4C95-8A98-3BA3A802E8A3}"/>
+              </a:ext>
+            </a:extLst>
+          </p:cNvPr>
+          <p:cNvSpPr/>
+          <p:nvPr/>
+        </p:nvSpPr>
+        <p:spPr>
+          <a:xfrm>
+            <a:off x="189352" y="3973852"/>
+            <a:ext cx="4409671" cy="2722293"/>
+          </a:xfrm>
+          <a:prstGeom prst="ellipse">
+            <a:avLst/>
+          </a:prstGeom>
+          <a:solidFill>
+            <a:schemeClr val="accent5">
+              <a:lumMod val="20000"/>
+              <a:lumOff val="80000"/>
+            </a:schemeClr>
+          </a:solidFill>
+          <a:ln w="25400">
+            <a:solidFill>
+              <a:schemeClr val="accent5">
+                <a:lumMod val="50000"/>
+              </a:schemeClr>
+            </a:solidFill>
+          </a:ln>
+        </p:spPr>
+        <p:style>
+          <a:lnRef idx="2">
+            <a:schemeClr val="accent1">
+              <a:shade val="50000"/>
+            </a:schemeClr>
+          </a:lnRef>
+          <a:fillRef idx="1">
+            <a:schemeClr val="accent1"/>
+          </a:fillRef>
+          <a:effectRef idx="0">
+            <a:schemeClr val="accent1"/>
+          </a:effectRef>
+          <a:fontRef idx="minor">
+            <a:schemeClr val="lt1"/>
+          </a:fontRef>
+        </p:style>
+        <p:txBody>
+          <a:bodyPr rtlCol="0" anchor="ctr"/>
+          <a:lstStyle/>
+          <a:p>
+            <a:pPr algn="ctr"/>
+            <a:endParaRPr lang="uk-UA" dirty="0"/>
+          </a:p>
+        </p:txBody>
+      </p:sp>
+      <p:sp>
+        <p:nvSpPr>
+          <p:cNvPr id="14" name="TextBox 13">
+            <a:extLst>
+              <a:ext uri="{FF2B5EF4-FFF2-40B4-BE49-F238E27FC236}">
+                <a16:creationId xmlns:a16="http://schemas.microsoft.com/office/drawing/2014/main" id="{BFDE246B-DB07-4ECF-8BBB-2A08818942C8}"/>
+              </a:ext>
+            </a:extLst>
+          </p:cNvPr>
+          <p:cNvSpPr txBox="1"/>
+          <p:nvPr/>
+        </p:nvSpPr>
+        <p:spPr>
+          <a:xfrm>
+            <a:off x="420824" y="4365502"/>
+            <a:ext cx="4095682" cy="2169825"/>
+          </a:xfrm>
+          <a:prstGeom prst="rect">
+            <a:avLst/>
+          </a:prstGeom>
+          <a:noFill/>
+        </p:spPr>
+        <p:txBody>
+          <a:bodyPr wrap="square">
+            <a:spAutoFit/>
+          </a:bodyPr>
+          <a:lstStyle>
+            <a:defPPr>
+              <a:defRPr lang="en-US"/>
+            </a:defPPr>
+            <a:lvl1pPr algn="ctr">
+              <a:lnSpc>
+                <a:spcPct val="90000"/>
+              </a:lnSpc>
+              <a:defRPr sz="4500"/>
+            </a:lvl1pPr>
+          </a:lstStyle>
+          <a:p>
+            <a:r>
+              <a:rPr lang="uk-UA" dirty="0"/>
+              <a:t>Кафедра інформаційних систем</a:t>
+            </a:r>
+          </a:p>
+        </p:txBody>
+      </p:sp>
+      <p:sp>
+        <p:nvSpPr>
+          <p:cNvPr id="15" name="Овал 14">
+            <a:extLst>
+              <a:ext uri="{FF2B5EF4-FFF2-40B4-BE49-F238E27FC236}">
+                <a16:creationId xmlns:a16="http://schemas.microsoft.com/office/drawing/2014/main" id="{C71FAB1E-5DD8-4284-A0FC-17BC96ADD831}"/>
+              </a:ext>
+            </a:extLst>
+          </p:cNvPr>
+          <p:cNvSpPr/>
+          <p:nvPr/>
+        </p:nvSpPr>
+        <p:spPr>
+          <a:xfrm>
+            <a:off x="2567818" y="2016714"/>
+            <a:ext cx="6542198" cy="2944826"/>
+          </a:xfrm>
+          <a:prstGeom prst="ellipse">
+            <a:avLst/>
+          </a:prstGeom>
+          <a:solidFill>
+            <a:schemeClr val="accent5">
+              <a:lumMod val="20000"/>
+              <a:lumOff val="80000"/>
+            </a:schemeClr>
+          </a:solidFill>
+          <a:ln w="25400">
+            <a:solidFill>
+              <a:schemeClr val="accent5">
+                <a:lumMod val="50000"/>
+              </a:schemeClr>
+            </a:solidFill>
+          </a:ln>
+        </p:spPr>
+        <p:style>
+          <a:lnRef idx="2">
+            <a:schemeClr val="accent1">
+              <a:shade val="50000"/>
+            </a:schemeClr>
+          </a:lnRef>
+          <a:fillRef idx="1">
+            <a:schemeClr val="accent1"/>
+          </a:fillRef>
+          <a:effectRef idx="0">
+            <a:schemeClr val="accent1"/>
+          </a:effectRef>
+          <a:fontRef idx="minor">
+            <a:schemeClr val="lt1"/>
+          </a:fontRef>
+        </p:style>
+        <p:txBody>
+          <a:bodyPr rtlCol="0" anchor="ctr"/>
+          <a:lstStyle/>
+          <a:p>
+            <a:pPr algn="ctr"/>
+            <a:endParaRPr lang="uk-UA" dirty="0"/>
+          </a:p>
+        </p:txBody>
+      </p:sp>
+      <p:sp>
+        <p:nvSpPr>
+          <p:cNvPr id="5" name="Rectangle 4"/>
+          <p:cNvSpPr/>
+          <p:nvPr/>
+        </p:nvSpPr>
+        <p:spPr>
+          <a:xfrm>
+            <a:off x="2538560" y="2259510"/>
+            <a:ext cx="6650997" cy="2585323"/>
+          </a:xfrm>
+          <a:prstGeom prst="rect">
+            <a:avLst/>
+          </a:prstGeom>
+          <a:noFill/>
+        </p:spPr>
+        <p:txBody>
+          <a:bodyPr wrap="square">
+            <a:spAutoFit/>
+          </a:bodyPr>
+          <a:lstStyle/>
+          <a:p>
+            <a:pPr algn="ctr">
+              <a:lnSpc>
+                <a:spcPct val="90000"/>
+              </a:lnSpc>
+            </a:pPr>
+            <a:r>
+              <a:rPr lang="uk-UA" altLang="ru-RU" sz="4500"/>
+              <a:t> Фішки з </a:t>
+            </a:r>
+          </a:p>
+          <a:p>
+            <a:pPr algn="ctr">
+              <a:lnSpc>
+                <a:spcPct val="90000"/>
+              </a:lnSpc>
+            </a:pPr>
+            <a:r>
+              <a:rPr lang="uk-UA" altLang="ru-RU" sz="4500"/>
+              <a:t>доповненою </a:t>
+            </a:r>
+            <a:r>
+              <a:rPr lang="uk-UA" altLang="ru-RU" sz="4500" dirty="0"/>
+              <a:t>реальністю</a:t>
+            </a:r>
+          </a:p>
+          <a:p>
+            <a:pPr algn="ctr">
+              <a:lnSpc>
+                <a:spcPct val="90000"/>
+              </a:lnSpc>
+            </a:pPr>
+            <a:r>
+              <a:rPr lang="uk-UA" altLang="ru-RU" sz="4500" dirty="0"/>
+              <a:t>для вивчення </a:t>
+            </a:r>
+          </a:p>
+          <a:p>
+            <a:pPr algn="ctr">
+              <a:lnSpc>
+                <a:spcPct val="90000"/>
+              </a:lnSpc>
+            </a:pPr>
+            <a:r>
+              <a:rPr lang="uk-UA" altLang="ru-RU" sz="4500" dirty="0"/>
+              <a:t>іноземних слів</a:t>
+            </a:r>
+          </a:p>
+        </p:txBody>
+      </p:sp>
+    </p:spTree>
+    <p:extLst>
+      <p:ext uri="{BB962C8B-B14F-4D97-AF65-F5344CB8AC3E}">
+        <p14:creationId xmlns:p14="http://schemas.microsoft.com/office/powerpoint/2010/main" val="3059000179"/>
+      </p:ext>
+    </p:extLst>
+  </p:cSld>
+  <p:clrMapOvr>
+    <a:masterClrMapping/>
+  </p:clrMapOvr>
+  <p:timing>
+    <p:tnLst>
+      <p:par>
+        <p:cTn id="1" dur="indefinite" restart="never" nodeType="tmRoot">
+          <p:childTnLst>
+            <p:seq concurrent="1" nextAc="seek">
+              <p:cTn id="2" dur="indefinite" nodeType="mainSeq">
+                <p:childTnLst>
+                  <p:par>
+                    <p:cTn id="3" fill="hold">
+                      <p:stCondLst>
+                        <p:cond delay="indefinite"/>
+                      </p:stCondLst>
+                      <p:childTnLst>
+                        <p:par>
+                          <p:cTn id="4" fill="hold">
+                            <p:stCondLst>
+                              <p:cond delay="0"/>
+                            </p:stCondLst>
+                            <p:childTnLst>
+                              <p:par>
+                                <p:cTn id="5" presetID="1" presetClass="entr" presetSubtype="0" fill="hold" grpId="0" nodeType="clickEffect">
+                                  <p:stCondLst>
+                                    <p:cond delay="0"/>
+                                  </p:stCondLst>
+                                  <p:childTnLst>
+                                    <p:set>
+                                      <p:cBhvr>
+                                        <p:cTn id="6" dur="1" fill="hold">
+                                          <p:stCondLst>
+                                            <p:cond delay="0"/>
+                                          </p:stCondLst>
+                                        </p:cTn>
+                                        <p:tgtEl>
+                                          <p:spTgt spid="15"/>
+                                        </p:tgtEl>
+                                        <p:attrNameLst>
+                                          <p:attrName>style.visibility</p:attrName>
+                                        </p:attrNameLst>
+                                      </p:cBhvr>
+                                      <p:to>
+                                        <p:strVal val="visible"/>
+                                      </p:to>
+                                    </p:set>
+                                  </p:childTnLst>
+                                </p:cTn>
+                              </p:par>
+                              <p:par>
+                                <p:cTn id="7" presetID="1" presetClass="entr" presetSubtype="0" fill="hold" grpId="0" nodeType="withEffect">
+                                  <p:stCondLst>
+                                    <p:cond delay="0"/>
+                                  </p:stCondLst>
+                                  <p:childTnLst>
+                                    <p:set>
+                                      <p:cBhvr>
+                                        <p:cTn id="8" dur="1" fill="hold">
+                                          <p:stCondLst>
+                                            <p:cond delay="0"/>
+                                          </p:stCondLst>
+                                        </p:cTn>
+                                        <p:tgtEl>
+                                          <p:spTgt spid="5"/>
+                                        </p:tgtEl>
+                                        <p:attrNameLst>
+                                          <p:attrName>style.visibility</p:attrName>
+                                        </p:attrNameLst>
+                                      </p:cBhvr>
+                                      <p:to>
+                                        <p:strVal val="visible"/>
+                                      </p:to>
+                                    </p:set>
+                                  </p:childTnLst>
+                                </p:cTn>
+                              </p:par>
+                            </p:childTnLst>
+                          </p:cTn>
+                        </p:par>
+                      </p:childTnLst>
+                    </p:cTn>
+                  </p:par>
+                  <p:par>
+                    <p:cTn id="9" fill="hold">
+                      <p:stCondLst>
+                        <p:cond delay="indefinite"/>
+                      </p:stCondLst>
+                      <p:childTnLst>
+                        <p:par>
+                          <p:cTn id="10" fill="hold">
+                            <p:stCondLst>
+                              <p:cond delay="0"/>
+                            </p:stCondLst>
+                            <p:childTnLst>
+                              <p:par>
+                                <p:cTn id="11" presetID="1" presetClass="entr" presetSubtype="0" fill="hold" grpId="0" nodeType="clickEffect">
+                                  <p:stCondLst>
+                                    <p:cond delay="0"/>
+                                  </p:stCondLst>
+                                  <p:childTnLst>
+                                    <p:set>
+                                      <p:cBhvr>
+                                        <p:cTn id="12" dur="1" fill="hold">
+                                          <p:stCondLst>
+                                            <p:cond delay="0"/>
+                                          </p:stCondLst>
+                                        </p:cTn>
+                                        <p:tgtEl>
+                                          <p:spTgt spid="9"/>
+                                        </p:tgtEl>
+                                        <p:attrNameLst>
+                                          <p:attrName>style.visibility</p:attrName>
+                                        </p:attrNameLst>
+                                      </p:cBhvr>
+                                      <p:to>
+                                        <p:strVal val="visible"/>
+                                      </p:to>
+                                    </p:set>
+                                  </p:childTnLst>
+                                </p:cTn>
+                              </p:par>
+                              <p:par>
+                                <p:cTn id="13" presetID="1" presetClass="entr" presetSubtype="0" fill="hold" grpId="0" nodeType="withEffect">
+                                  <p:stCondLst>
+                                    <p:cond delay="0"/>
+                                  </p:stCondLst>
+                                  <p:childTnLst>
+                                    <p:set>
+                                      <p:cBhvr>
+                                        <p:cTn id="14" dur="1" fill="hold">
+                                          <p:stCondLst>
+                                            <p:cond delay="0"/>
+                                          </p:stCondLst>
+                                        </p:cTn>
+                                        <p:tgtEl>
+                                          <p:spTgt spid="3"/>
+                                        </p:tgtEl>
+                                        <p:attrNameLst>
+                                          <p:attrName>style.visibility</p:attrName>
+                                        </p:attrNameLst>
+                                      </p:cBhvr>
+                                      <p:to>
+                                        <p:strVal val="visible"/>
+                                      </p:to>
+                                    </p:set>
+                                  </p:childTnLst>
+                                </p:cTn>
+                              </p:par>
+                            </p:childTnLst>
+                          </p:cTn>
+                        </p:par>
+                      </p:childTnLst>
+                    </p:cTn>
+                  </p:par>
+                  <p:par>
+                    <p:cTn id="15" fill="hold">
+                      <p:stCondLst>
+                        <p:cond delay="indefinite"/>
+                      </p:stCondLst>
+                      <p:childTnLst>
+                        <p:par>
+                          <p:cTn id="16" fill="hold">
+                            <p:stCondLst>
+                              <p:cond delay="0"/>
+                            </p:stCondLst>
+                            <p:childTnLst>
+                              <p:par>
+                                <p:cTn id="17" presetID="1" presetClass="entr" presetSubtype="0" fill="hold" grpId="0" nodeType="clickEffect">
+                                  <p:stCondLst>
+                                    <p:cond delay="0"/>
+                                  </p:stCondLst>
+                                  <p:childTnLst>
+                                    <p:set>
+                                      <p:cBhvr>
+                                        <p:cTn id="18" dur="1" fill="hold">
+                                          <p:stCondLst>
+                                            <p:cond delay="0"/>
+                                          </p:stCondLst>
+                                        </p:cTn>
+                                        <p:tgtEl>
+                                          <p:spTgt spid="12"/>
+                                        </p:tgtEl>
+                                        <p:attrNameLst>
+                                          <p:attrName>style.visibility</p:attrName>
+                                        </p:attrNameLst>
+                                      </p:cBhvr>
+                                      <p:to>
+                                        <p:strVal val="visible"/>
+                                      </p:to>
+                                    </p:set>
+                                  </p:childTnLst>
+                                </p:cTn>
+                              </p:par>
+                              <p:par>
+                                <p:cTn id="19" presetID="1" presetClass="entr" presetSubtype="0" fill="hold" grpId="0" nodeType="withEffect">
+                                  <p:stCondLst>
+                                    <p:cond delay="0"/>
+                                  </p:stCondLst>
+                                  <p:childTnLst>
+                                    <p:set>
+                                      <p:cBhvr>
+                                        <p:cTn id="20" dur="1" fill="hold">
+                                          <p:stCondLst>
+                                            <p:cond delay="0"/>
+                                          </p:stCondLst>
+                                        </p:cTn>
+                                        <p:tgtEl>
+                                          <p:spTgt spid="10"/>
+                                        </p:tgtEl>
+                                        <p:attrNameLst>
+                                          <p:attrName>style.visibility</p:attrName>
+                                        </p:attrNameLst>
+                                      </p:cBhvr>
+                                      <p:to>
+                                        <p:strVal val="visible"/>
+                                      </p:to>
+                                    </p:set>
+                                  </p:childTnLst>
+                                </p:cTn>
+                              </p:par>
+                            </p:childTnLst>
+                          </p:cTn>
+                        </p:par>
+                      </p:childTnLst>
+                    </p:cTn>
+                  </p:par>
+                  <p:par>
+                    <p:cTn id="21" fill="hold">
+                      <p:stCondLst>
+                        <p:cond delay="indefinite"/>
+                      </p:stCondLst>
+                      <p:childTnLst>
+                        <p:par>
+                          <p:cTn id="22" fill="hold">
+                            <p:stCondLst>
+                              <p:cond delay="0"/>
+                            </p:stCondLst>
+                            <p:childTnLst>
+                              <p:par>
+                                <p:cTn id="23" presetID="1" presetClass="entr" presetSubtype="0" fill="hold" grpId="0" nodeType="clickEffect">
+                                  <p:stCondLst>
+                                    <p:cond delay="0"/>
+                                  </p:stCondLst>
+                                  <p:childTnLst>
+                                    <p:set>
+                                      <p:cBhvr>
+                                        <p:cTn id="24" dur="1" fill="hold">
+                                          <p:stCondLst>
+                                            <p:cond delay="0"/>
+                                          </p:stCondLst>
+                                        </p:cTn>
+                                        <p:tgtEl>
+                                          <p:spTgt spid="14"/>
+                                        </p:tgtEl>
+                                        <p:attrNameLst>
+                                          <p:attrName>style.visibility</p:attrName>
+                                        </p:attrNameLst>
+                                      </p:cBhvr>
+                                      <p:to>
+                                        <p:strVal val="visible"/>
+                                      </p:to>
+                                    </p:set>
+                                  </p:childTnLst>
+                                </p:cTn>
+                              </p:par>
+                              <p:par>
+                                <p:cTn id="25" presetID="1" presetClass="entr" presetSubtype="0" fill="hold" grpId="0" nodeType="withEffect">
+                                  <p:stCondLst>
+                                    <p:cond delay="0"/>
+                                  </p:stCondLst>
+                                  <p:childTnLst>
+                                    <p:set>
+                                      <p:cBhvr>
+                                        <p:cTn id="26" dur="1" fill="hold">
+                                          <p:stCondLst>
+                                            <p:cond delay="0"/>
+                                          </p:stCondLst>
+                                        </p:cTn>
+                                        <p:tgtEl>
+                                          <p:spTgt spid="13"/>
+                                        </p:tgtEl>
+                                        <p:attrNameLst>
+                                          <p:attrName>style.visibility</p:attrName>
+                                        </p:attrNameLst>
+                                      </p:cBhvr>
+                                      <p:to>
+                                        <p:strVal val="visible"/>
+                                      </p:to>
+                                    </p:set>
+                                  </p:childTnLst>
+                                </p:cTn>
+                              </p:par>
+                            </p:childTnLst>
+                          </p:cTn>
+                        </p:par>
+                      </p:childTnLst>
+                    </p:cTn>
+                  </p:par>
+                  <p:par>
+                    <p:cTn id="27" fill="hold">
+                      <p:stCondLst>
+                        <p:cond delay="indefinite"/>
+                      </p:stCondLst>
+                      <p:childTnLst>
+                        <p:par>
+                          <p:cTn id="28" fill="hold">
+                            <p:stCondLst>
+                              <p:cond delay="0"/>
+                            </p:stCondLst>
+                            <p:childTnLst>
+                              <p:par>
+                                <p:cTn id="29" presetID="1" presetClass="entr" presetSubtype="0" fill="hold" nodeType="clickEffect">
+                                  <p:stCondLst>
+                                    <p:cond delay="0"/>
+                                  </p:stCondLst>
+                                  <p:childTnLst>
+                                    <p:set>
+                                      <p:cBhvr>
+                                        <p:cTn id="30" dur="1" fill="hold">
+                                          <p:stCondLst>
+                                            <p:cond delay="0"/>
+                                          </p:stCondLst>
+                                        </p:cTn>
+                                        <p:tgtEl>
+                                          <p:spTgt spid="6"/>
+                                        </p:tgtEl>
+                                        <p:attrNameLst>
+                                          <p:attrName>style.visibility</p:attrName>
+                                        </p:attrNameLst>
+                                      </p:cBhvr>
+                                      <p:to>
+                                        <p:strVal val="visible"/>
+                                      </p:to>
+                                    </p:set>
+                                  </p:childTnLst>
+                                </p:cTn>
+                              </p:par>
+                              <p:par>
+                                <p:cTn id="31" presetID="1" presetClass="entr" presetSubtype="0" fill="hold" nodeType="withEffect">
+                                  <p:stCondLst>
+                                    <p:cond delay="0"/>
+                                  </p:stCondLst>
+                                  <p:childTnLst>
+                                    <p:set>
+                                      <p:cBhvr>
+                                        <p:cTn id="32" dur="1" fill="hold">
+                                          <p:stCondLst>
+                                            <p:cond delay="0"/>
+                                          </p:stCondLst>
+                                        </p:cTn>
+                                        <p:tgtEl>
+                                          <p:spTgt spid="11"/>
+                                        </p:tgtEl>
+                                        <p:attrNameLst>
+                                          <p:attrName>style.visibility</p:attrName>
+                                        </p:attrNameLst>
+                                      </p:cBhvr>
+                                      <p:to>
+                                        <p:strVal val="visible"/>
+                                      </p:to>
+                                    </p:set>
+                                  </p:childTnLst>
+                                </p:cTn>
+                              </p:par>
+                            </p:childTnLst>
+                          </p:cTn>
+                        </p:par>
+                      </p:childTnLst>
+                    </p:cTn>
+                  </p:par>
+                </p:childTnLst>
+              </p:cTn>
+              <p:prevCondLst>
+                <p:cond evt="onPrev" delay="0">
+                  <p:tgtEl>
+                    <p:sldTgt/>
+                  </p:tgtEl>
+                </p:cond>
+              </p:prevCondLst>
+              <p:nextCondLst>
+                <p:cond evt="onNext" delay="0">
+                  <p:tgtEl>
+                    <p:sldTgt/>
+                  </p:tgtEl>
+                </p:cond>
+              </p:nextCondLst>
+            </p:seq>
+          </p:childTnLst>
+        </p:cTn>
+      </p:par>
+    </p:tnLst>
+    <p:bldLst>
+      <p:bldP spid="3" grpId="0" animBg="1"/>
+      <p:bldP spid="9" grpId="0"/>
+      <p:bldP spid="10" grpId="0" animBg="1"/>
+      <p:bldP spid="12" grpId="0"/>
+      <p:bldP spid="13" grpId="0" animBg="1"/>
+      <p:bldP spid="14" grpId="0"/>
+      <p:bldP spid="15" grpId="0" animBg="1"/>
+      <p:bldP spid="5" grpId="0"/>
+    </p:bldLst>
+  </p:timing>
+</p:sld>
+</file>
+
 <file path=ppt/theme/theme1.xml><?xml version="1.0" encoding="utf-8"?>
 <a:theme xmlns:a="http://schemas.openxmlformats.org/drawingml/2006/main" name="Office Theme">
   <a:themeElements>
